--- a/activity/M04A01/M04A01.pptx
+++ b/activity/M04A01/M04A01.pptx
@@ -1025,7 +1025,7 @@
             <a:fld id="{53CE91DE-ABC6-4D22-89A0-1765B629FB43}" type="datetimeFigureOut">
               <a:rPr lang="es-CO" smtClean="0"/>
               <a:pPr/>
-              <a:t>6/08/2025</a:t>
+              <a:t>21/11/2025</a:t>
             </a:fld>
             <a:endParaRPr lang="es-CO" dirty="0"/>
           </a:p>
@@ -3695,7 +3695,7 @@
             <a:fld id="{43DF08CB-A55A-40B1-AEFD-F19B3CFD19B5}" type="datetimeFigureOut">
               <a:rPr lang="es-CO" smtClean="0"/>
               <a:pPr/>
-              <a:t>6/08/2025</a:t>
+              <a:t>21/11/2025</a:t>
             </a:fld>
             <a:endParaRPr lang="es-CO" dirty="0"/>
           </a:p>
@@ -3862,7 +3862,7 @@
             <a:fld id="{43DF08CB-A55A-40B1-AEFD-F19B3CFD19B5}" type="datetimeFigureOut">
               <a:rPr lang="es-CO" smtClean="0"/>
               <a:pPr/>
-              <a:t>6/08/2025</a:t>
+              <a:t>21/11/2025</a:t>
             </a:fld>
             <a:endParaRPr lang="es-CO" dirty="0"/>
           </a:p>
@@ -4039,7 +4039,7 @@
             <a:fld id="{43DF08CB-A55A-40B1-AEFD-F19B3CFD19B5}" type="datetimeFigureOut">
               <a:rPr lang="es-CO" smtClean="0"/>
               <a:pPr/>
-              <a:t>6/08/2025</a:t>
+              <a:t>21/11/2025</a:t>
             </a:fld>
             <a:endParaRPr lang="es-CO" dirty="0"/>
           </a:p>
@@ -4206,7 +4206,7 @@
             <a:fld id="{43DF08CB-A55A-40B1-AEFD-F19B3CFD19B5}" type="datetimeFigureOut">
               <a:rPr lang="es-CO" smtClean="0"/>
               <a:pPr/>
-              <a:t>6/08/2025</a:t>
+              <a:t>21/11/2025</a:t>
             </a:fld>
             <a:endParaRPr lang="es-CO" dirty="0"/>
           </a:p>
@@ -4449,7 +4449,7 @@
             <a:fld id="{43DF08CB-A55A-40B1-AEFD-F19B3CFD19B5}" type="datetimeFigureOut">
               <a:rPr lang="es-CO" smtClean="0"/>
               <a:pPr/>
-              <a:t>6/08/2025</a:t>
+              <a:t>21/11/2025</a:t>
             </a:fld>
             <a:endParaRPr lang="es-CO" dirty="0"/>
           </a:p>
@@ -4734,7 +4734,7 @@
             <a:fld id="{43DF08CB-A55A-40B1-AEFD-F19B3CFD19B5}" type="datetimeFigureOut">
               <a:rPr lang="es-CO" smtClean="0"/>
               <a:pPr/>
-              <a:t>6/08/2025</a:t>
+              <a:t>21/11/2025</a:t>
             </a:fld>
             <a:endParaRPr lang="es-CO" dirty="0"/>
           </a:p>
@@ -5153,7 +5153,7 @@
             <a:fld id="{43DF08CB-A55A-40B1-AEFD-F19B3CFD19B5}" type="datetimeFigureOut">
               <a:rPr lang="es-CO" smtClean="0"/>
               <a:pPr/>
-              <a:t>6/08/2025</a:t>
+              <a:t>21/11/2025</a:t>
             </a:fld>
             <a:endParaRPr lang="es-CO" dirty="0"/>
           </a:p>
@@ -5268,7 +5268,7 @@
             <a:fld id="{43DF08CB-A55A-40B1-AEFD-F19B3CFD19B5}" type="datetimeFigureOut">
               <a:rPr lang="es-CO" smtClean="0"/>
               <a:pPr/>
-              <a:t>6/08/2025</a:t>
+              <a:t>21/11/2025</a:t>
             </a:fld>
             <a:endParaRPr lang="es-CO" dirty="0"/>
           </a:p>
@@ -5360,7 +5360,7 @@
             <a:fld id="{43DF08CB-A55A-40B1-AEFD-F19B3CFD19B5}" type="datetimeFigureOut">
               <a:rPr lang="es-CO" smtClean="0"/>
               <a:pPr/>
-              <a:t>6/08/2025</a:t>
+              <a:t>21/11/2025</a:t>
             </a:fld>
             <a:endParaRPr lang="es-CO" dirty="0"/>
           </a:p>
@@ -5634,7 +5634,7 @@
             <a:fld id="{43DF08CB-A55A-40B1-AEFD-F19B3CFD19B5}" type="datetimeFigureOut">
               <a:rPr lang="es-CO" smtClean="0"/>
               <a:pPr/>
-              <a:t>6/08/2025</a:t>
+              <a:t>21/11/2025</a:t>
             </a:fld>
             <a:endParaRPr lang="es-CO" dirty="0"/>
           </a:p>
@@ -5884,7 +5884,7 @@
             <a:fld id="{43DF08CB-A55A-40B1-AEFD-F19B3CFD19B5}" type="datetimeFigureOut">
               <a:rPr lang="es-CO" smtClean="0"/>
               <a:pPr/>
-              <a:t>6/08/2025</a:t>
+              <a:t>21/11/2025</a:t>
             </a:fld>
             <a:endParaRPr lang="es-CO" dirty="0"/>
           </a:p>
@@ -6097,7 +6097,7 @@
             <a:fld id="{43DF08CB-A55A-40B1-AEFD-F19B3CFD19B5}" type="datetimeFigureOut">
               <a:rPr lang="es-CO" smtClean="0"/>
               <a:pPr/>
-              <a:t>6/08/2025</a:t>
+              <a:t>21/11/2025</a:t>
             </a:fld>
             <a:endParaRPr lang="es-CO" dirty="0"/>
           </a:p>
